--- a/task140/golden/c22_capacity_review_2027q1.pptx
+++ b/task140/golden/c22_capacity_review_2027q1.pptx
@@ -3754,7 +3754,7 @@
                         </a:defRPr>
                       </a:pPr>
                       <a:r>
-                        <a:t>594</a:t>
+                        <a:t>under 1,000</a:t>
                       </a:r>
                     </a:p>
                   </a:txBody>
@@ -3770,6 +3770,9 @@
                           <a:latin typeface="Calibri"/>
                         </a:defRPr>
                       </a:pPr>
+                      <a:r>
+                        <a:t>left after the guarantee (CS-3 5.2)</a:t>
+                      </a:r>
                     </a:p>
                   </a:txBody>
                   <a:tcPr/>
